--- a/chapter5/parts/part-03-duplicates-and-inconsistency/clip.pptx
+++ b/chapter5/parts/part-03-duplicates-and-inconsistency/clip.pptx
@@ -4255,10 +4255,12 @@
           </a:bodyPr>
           <a:lstStyle/>
           <a:p>
-            <a:pPr>
+            <a:pPr lvl="0" marL="457200" indent="-228600">
+              <a:buFont typeface="Calibri"/>
               <a:spcAft>
                 <a:spcPts val="1000"/>
               </a:spcAft>
+              <a:buSzPct val="100000"/>
               <a:buChar char="•"/>
               <a:lnSpc>
                 <a:spcPts val="2200"/>
@@ -4275,10 +4277,12 @@
             </a:r>
           </a:p>
           <a:p>
-            <a:pPr>
+            <a:pPr lvl="0" marL="457200" indent="-228600">
+              <a:buFont typeface="Calibri"/>
               <a:spcAft>
                 <a:spcPts val="1000"/>
               </a:spcAft>
+              <a:buSzPct val="100000"/>
               <a:buChar char="•"/>
               <a:lnSpc>
                 <a:spcPts val="2200"/>
@@ -4414,10 +4418,12 @@
           </a:bodyPr>
           <a:lstStyle/>
           <a:p>
-            <a:pPr>
+            <a:pPr lvl="0" marL="457200" indent="-228600">
+              <a:buFont typeface="Calibri"/>
               <a:spcAft>
                 <a:spcPts val="1000"/>
               </a:spcAft>
+              <a:buSzPct val="100000"/>
               <a:buChar char="•"/>
               <a:lnSpc>
                 <a:spcPts val="2200"/>
@@ -4434,10 +4440,12 @@
             </a:r>
           </a:p>
           <a:p>
-            <a:pPr>
+            <a:pPr lvl="0" marL="457200" indent="-228600">
+              <a:buFont typeface="Calibri"/>
               <a:spcAft>
                 <a:spcPts val="1000"/>
               </a:spcAft>
+              <a:buSzPct val="100000"/>
               <a:buChar char="•"/>
               <a:lnSpc>
                 <a:spcPts val="2200"/>
@@ -4454,10 +4462,12 @@
             </a:r>
           </a:p>
           <a:p>
-            <a:pPr>
+            <a:pPr lvl="0" marL="457200" indent="-228600">
+              <a:buFont typeface="Calibri"/>
               <a:spcAft>
                 <a:spcPts val="1000"/>
               </a:spcAft>
+              <a:buSzPct val="100000"/>
               <a:buChar char="•"/>
               <a:lnSpc>
                 <a:spcPts val="2200"/>
@@ -4593,10 +4603,12 @@
           </a:bodyPr>
           <a:lstStyle/>
           <a:p>
-            <a:pPr>
+            <a:pPr lvl="0" marL="457200" indent="-228600">
+              <a:buFont typeface="Calibri"/>
               <a:spcAft>
                 <a:spcPts val="1000"/>
               </a:spcAft>
+              <a:buSzPct val="100000"/>
               <a:buChar char="•"/>
               <a:lnSpc>
                 <a:spcPts val="2200"/>
@@ -4613,10 +4625,12 @@
             </a:r>
           </a:p>
           <a:p>
-            <a:pPr>
+            <a:pPr lvl="0" marL="457200" indent="-228600">
+              <a:buFont typeface="Calibri"/>
               <a:spcAft>
                 <a:spcPts val="1000"/>
               </a:spcAft>
+              <a:buSzPct val="100000"/>
               <a:buChar char="•"/>
               <a:lnSpc>
                 <a:spcPts val="2200"/>
@@ -4633,10 +4647,12 @@
             </a:r>
           </a:p>
           <a:p>
-            <a:pPr>
+            <a:pPr lvl="0" marL="457200" indent="-228600">
+              <a:buFont typeface="Calibri"/>
               <a:spcAft>
                 <a:spcPts val="1000"/>
               </a:spcAft>
+              <a:buSzPct val="100000"/>
               <a:buChar char="•"/>
               <a:lnSpc>
                 <a:spcPts val="2200"/>
@@ -4653,10 +4669,12 @@
             </a:r>
           </a:p>
           <a:p>
-            <a:pPr>
+            <a:pPr lvl="0" marL="457200" indent="-228600">
+              <a:buFont typeface="Calibri"/>
               <a:spcAft>
                 <a:spcPts val="1000"/>
               </a:spcAft>
+              <a:buSzPct val="100000"/>
               <a:buChar char="•"/>
               <a:lnSpc>
                 <a:spcPts val="2200"/>
@@ -4792,10 +4810,12 @@
           </a:bodyPr>
           <a:lstStyle/>
           <a:p>
-            <a:pPr>
+            <a:pPr lvl="0" marL="457200" indent="-228600">
+              <a:buFont typeface="Calibri"/>
               <a:spcAft>
                 <a:spcPts val="1000"/>
               </a:spcAft>
+              <a:buSzPct val="100000"/>
               <a:buChar char="•"/>
               <a:lnSpc>
                 <a:spcPts val="2200"/>
@@ -4812,10 +4832,12 @@
             </a:r>
           </a:p>
           <a:p>
-            <a:pPr>
+            <a:pPr lvl="0" marL="457200" indent="-228600">
+              <a:buFont typeface="Calibri"/>
               <a:spcAft>
                 <a:spcPts val="1000"/>
               </a:spcAft>
+              <a:buSzPct val="100000"/>
               <a:buChar char="•"/>
               <a:lnSpc>
                 <a:spcPts val="2200"/>
@@ -4832,10 +4854,12 @@
             </a:r>
           </a:p>
           <a:p>
-            <a:pPr>
+            <a:pPr lvl="0" marL="457200" indent="-228600">
+              <a:buFont typeface="Calibri"/>
               <a:spcAft>
                 <a:spcPts val="1000"/>
               </a:spcAft>
+              <a:buSzPct val="100000"/>
               <a:buChar char="•"/>
               <a:lnSpc>
                 <a:spcPts val="2200"/>
@@ -4852,10 +4876,12 @@
             </a:r>
           </a:p>
           <a:p>
-            <a:pPr>
+            <a:pPr lvl="0" marL="457200" indent="-228600">
+              <a:buFont typeface="Calibri"/>
               <a:spcAft>
                 <a:spcPts val="1000"/>
               </a:spcAft>
+              <a:buSzPct val="100000"/>
               <a:buChar char="•"/>
               <a:lnSpc>
                 <a:spcPts val="2200"/>
@@ -4872,10 +4898,12 @@
             </a:r>
           </a:p>
           <a:p>
-            <a:pPr>
+            <a:pPr lvl="0" marL="457200" indent="-228600">
+              <a:buFont typeface="Calibri"/>
               <a:spcAft>
                 <a:spcPts val="1000"/>
               </a:spcAft>
+              <a:buSzPct val="100000"/>
               <a:buChar char="•"/>
               <a:lnSpc>
                 <a:spcPts val="2200"/>
@@ -5011,10 +5039,12 @@
           </a:bodyPr>
           <a:lstStyle/>
           <a:p>
-            <a:pPr>
+            <a:pPr lvl="0" marL="457200" indent="-228600">
+              <a:buFont typeface="Calibri"/>
               <a:spcAft>
                 <a:spcPts val="1000"/>
               </a:spcAft>
+              <a:buSzPct val="100000"/>
               <a:buChar char="•"/>
               <a:lnSpc>
                 <a:spcPts val="2200"/>
@@ -5031,10 +5061,12 @@
             </a:r>
           </a:p>
           <a:p>
-            <a:pPr>
+            <a:pPr lvl="0" marL="457200" indent="-228600">
+              <a:buFont typeface="Calibri"/>
               <a:spcAft>
                 <a:spcPts val="1000"/>
               </a:spcAft>
+              <a:buSzPct val="100000"/>
               <a:buChar char="•"/>
               <a:lnSpc>
                 <a:spcPts val="2200"/>
@@ -5051,10 +5083,12 @@
             </a:r>
           </a:p>
           <a:p>
-            <a:pPr>
+            <a:pPr lvl="0" marL="457200" indent="-228600">
+              <a:buFont typeface="Calibri"/>
               <a:spcAft>
                 <a:spcPts val="1000"/>
               </a:spcAft>
+              <a:buSzPct val="100000"/>
               <a:buChar char="•"/>
               <a:lnSpc>
                 <a:spcPts val="2200"/>
@@ -5071,10 +5105,12 @@
             </a:r>
           </a:p>
           <a:p>
-            <a:pPr>
+            <a:pPr lvl="0" marL="457200" indent="-228600">
+              <a:buFont typeface="Calibri"/>
               <a:spcAft>
                 <a:spcPts val="1000"/>
               </a:spcAft>
+              <a:buSzPct val="100000"/>
               <a:buChar char="•"/>
               <a:lnSpc>
                 <a:spcPts val="2200"/>
@@ -5210,10 +5246,12 @@
           </a:bodyPr>
           <a:lstStyle/>
           <a:p>
-            <a:pPr>
+            <a:pPr lvl="0" marL="457200" indent="-228600">
+              <a:buFont typeface="Calibri"/>
               <a:spcAft>
                 <a:spcPts val="1000"/>
               </a:spcAft>
+              <a:buSzPct val="100000"/>
               <a:buChar char="•"/>
               <a:lnSpc>
                 <a:spcPts val="2200"/>
@@ -5230,10 +5268,12 @@
             </a:r>
           </a:p>
           <a:p>
-            <a:pPr>
+            <a:pPr lvl="0" marL="457200" indent="-228600">
+              <a:buFont typeface="Calibri"/>
               <a:spcAft>
                 <a:spcPts val="1000"/>
               </a:spcAft>
+              <a:buSzPct val="100000"/>
               <a:buChar char="•"/>
               <a:lnSpc>
                 <a:spcPts val="2200"/>
@@ -5250,10 +5290,12 @@
             </a:r>
           </a:p>
           <a:p>
-            <a:pPr>
+            <a:pPr lvl="0" marL="457200" indent="-228600">
+              <a:buFont typeface="Calibri"/>
               <a:spcAft>
                 <a:spcPts val="1000"/>
               </a:spcAft>
+              <a:buSzPct val="100000"/>
               <a:buChar char="•"/>
               <a:lnSpc>
                 <a:spcPts val="2200"/>
@@ -5270,10 +5312,12 @@
             </a:r>
           </a:p>
           <a:p>
-            <a:pPr>
+            <a:pPr lvl="0" marL="457200" indent="-228600">
+              <a:buFont typeface="Calibri"/>
               <a:spcAft>
                 <a:spcPts val="1000"/>
               </a:spcAft>
+              <a:buSzPct val="100000"/>
               <a:buChar char="•"/>
               <a:lnSpc>
                 <a:spcPts val="2200"/>
@@ -5409,10 +5453,12 @@
           </a:bodyPr>
           <a:lstStyle/>
           <a:p>
-            <a:pPr>
+            <a:pPr lvl="0" marL="457200" indent="-228600">
+              <a:buFont typeface="Calibri"/>
               <a:spcAft>
                 <a:spcPts val="1000"/>
               </a:spcAft>
+              <a:buSzPct val="100000"/>
               <a:buChar char="•"/>
               <a:lnSpc>
                 <a:spcPts val="2200"/>
@@ -5429,10 +5475,12 @@
             </a:r>
           </a:p>
           <a:p>
-            <a:pPr>
+            <a:pPr lvl="0" marL="457200" indent="-228600">
+              <a:buFont typeface="Calibri"/>
               <a:spcAft>
                 <a:spcPts val="1000"/>
               </a:spcAft>
+              <a:buSzPct val="100000"/>
               <a:buChar char="•"/>
               <a:lnSpc>
                 <a:spcPts val="2200"/>
@@ -5449,10 +5497,12 @@
             </a:r>
           </a:p>
           <a:p>
-            <a:pPr>
+            <a:pPr lvl="0" marL="457200" indent="-228600">
+              <a:buFont typeface="Calibri"/>
               <a:spcAft>
                 <a:spcPts val="1000"/>
               </a:spcAft>
+              <a:buSzPct val="100000"/>
               <a:buChar char="•"/>
               <a:lnSpc>
                 <a:spcPts val="2200"/>
@@ -5588,10 +5638,12 @@
           </a:bodyPr>
           <a:lstStyle/>
           <a:p>
-            <a:pPr>
+            <a:pPr lvl="0" marL="457200" indent="-228600">
+              <a:buFont typeface="Calibri"/>
               <a:spcAft>
                 <a:spcPts val="1000"/>
               </a:spcAft>
+              <a:buSzPct val="100000"/>
               <a:buChar char="•"/>
               <a:lnSpc>
                 <a:spcPts val="2200"/>
@@ -5608,10 +5660,12 @@
             </a:r>
           </a:p>
           <a:p>
-            <a:pPr>
+            <a:pPr lvl="0" marL="457200" indent="-228600">
+              <a:buFont typeface="Calibri"/>
               <a:spcAft>
                 <a:spcPts val="1000"/>
               </a:spcAft>
+              <a:buSzPct val="100000"/>
               <a:buChar char="•"/>
               <a:lnSpc>
                 <a:spcPts val="2200"/>
